--- a/classes/parte-13-seguridad-movil-iot-e-inalambrica/262-pentest-de-aplicaciones-android/clase-262-presentacion.pptx
+++ b/classes/parte-13-seguridad-movil-iot-e-inalambrica/262-pentest-de-aplicaciones-android/clase-262-presentacion.pptx
@@ -17,6 +17,10 @@
     <p:sldId id="265" r:id="rId16"/>
     <p:sldId id="266" r:id="rId17"/>
     <p:sldId id="267" r:id="rId18"/>
+    <p:sldId id="268" r:id="rId19"/>
+    <p:sldId id="269" r:id="rId20"/>
+    <p:sldId id="270" r:id="rId21"/>
+    <p:sldId id="271" r:id="rId22"/>
   </p:sldIdLst>
   <p:sldSz cx="9144000" cy="6858000" type="screen4x3"/>
   <p:notesSz cx="6858000" cy="9144000"/>
@@ -3198,7 +3202,7 @@
                   <a:srgbClr val="0B3D2E"/>
                 </a:solidFill>
               </a:rPr>
-              <a:t>⚠️ Errores comunes</a:t>
+              <a:t>🧪 Laboratorio guiado</a:t>
             </a:r>
           </a:p>
         </p:txBody>
@@ -3236,67 +3240,97 @@
                   <a:srgbClr val="22282E"/>
                 </a:solidFill>
               </a:rPr>
-              <a:t>•  Burp no ve tráfico HTTPS — El CA no está en el almacén de sistema o hay pinning; instala CA de sistema y evade pinning</a:t>
-            </a:r>
-          </a:p>
-          <a:p>
-            <a:pPr>
-              <a:spcAft>
-                <a:spcPts val="600"/>
-              </a:spcAft>
-            </a:pPr>
-            <a:r>
-              <a:rPr sz="1500">
-                <a:solidFill>
-                  <a:srgbClr val="22282E"/>
-                </a:solidFill>
-              </a:rPr>
-              <a:t>•  Failed to spawn: unable to find process (Frida) — frida-server no corre o versión distinta; empareja versiones cliente/servidor</a:t>
-            </a:r>
-          </a:p>
-          <a:p>
-            <a:pPr>
-              <a:spcAft>
-                <a:spcPts val="600"/>
-              </a:spcAft>
-            </a:pPr>
-            <a:r>
-              <a:rPr sz="1500">
-                <a:solidFill>
-                  <a:srgbClr val="22282E"/>
-                </a:solidFill>
-              </a:rPr>
-              <a:t>•  App se cierra al abrir — Root/emulador/pinning detection; usa objection para desactivarlos</a:t>
-            </a:r>
-          </a:p>
-          <a:p>
-            <a:pPr>
-              <a:spcAft>
-                <a:spcPts val="600"/>
-              </a:spcAft>
-            </a:pPr>
-            <a:r>
-              <a:rPr sz="1500">
-                <a:solidFill>
-                  <a:srgbClr val="22282E"/>
-                </a:solidFill>
-              </a:rPr>
-              <a:t>•  apktool falla al recompilar — Recursos corruptos; usa -r o trabaja con smali sin recompilar</a:t>
-            </a:r>
-          </a:p>
-          <a:p>
-            <a:pPr>
-              <a:spcAft>
-                <a:spcPts val="600"/>
-              </a:spcAft>
-            </a:pPr>
-            <a:r>
-              <a:rPr sz="1500">
-                <a:solidFill>
-                  <a:srgbClr val="22282E"/>
-                </a:solidFill>
-              </a:rPr>
-              <a:t>•  CA instalado como "usuario" ignorado — Desde Android 7 las apps ignoran CA de usuario; instálalo como sistema</a:t>
+              <a:t>•  Prepara la app objetivo: instala una app vulnerable propia (p. ej. InsecureBankv2) con adb install app.apk.</a:t>
+            </a:r>
+          </a:p>
+          <a:p>
+            <a:pPr>
+              <a:spcAft>
+                <a:spcPts val="600"/>
+              </a:spcAft>
+            </a:pPr>
+            <a:r>
+              <a:rPr sz="1500">
+                <a:solidFill>
+                  <a:srgbClr val="22282E"/>
+                </a:solidFill>
+              </a:rPr>
+              <a:t>•  Análisis estático: sube el APK a MobSF. Anota secretos hardcodeados, permisos peligrosos y componentes exportados que reporte.</a:t>
+            </a:r>
+          </a:p>
+          <a:p>
+            <a:pPr>
+              <a:spcAft>
+                <a:spcPts val="600"/>
+              </a:spcAft>
+            </a:pPr>
+            <a:r>
+              <a:rPr sz="1500">
+                <a:solidFill>
+                  <a:srgbClr val="22282E"/>
+                </a:solidFill>
+              </a:rPr>
+              <a:t>•  Desensambla: apktool d app.apk -o appsrc y jadx app.apk. Busca cadenas sospechosas: grep -ri "http://\|password\|apikey" appsrc.</a:t>
+            </a:r>
+          </a:p>
+          <a:p>
+            <a:pPr>
+              <a:spcAft>
+                <a:spcPts val="600"/>
+              </a:spcAft>
+            </a:pPr>
+            <a:r>
+              <a:rPr sz="1500">
+                <a:solidFill>
+                  <a:srgbClr val="22282E"/>
+                </a:solidFill>
+              </a:rPr>
+              <a:t>•  Configura el proxy: define el proxy del AVD hacia Burp e instala el CA de Burp como certificado del sistema (con root: remonta /system y copia el .0).</a:t>
+            </a:r>
+          </a:p>
+          <a:p>
+            <a:pPr>
+              <a:spcAft>
+                <a:spcPts val="600"/>
+              </a:spcAft>
+            </a:pPr>
+            <a:r>
+              <a:rPr sz="1500">
+                <a:solidFill>
+                  <a:srgbClr val="22282E"/>
+                </a:solidFill>
+              </a:rPr>
+              <a:t>•  Evade el pinning: lanza objection -g &lt;paquete&gt; explore y ejecuta android sslpinning disable, o usa un script Frida de bypass. Verifica que el tráfico HTTPS aparece en Burp.</a:t>
+            </a:r>
+          </a:p>
+          <a:p>
+            <a:pPr>
+              <a:spcAft>
+                <a:spcPts val="600"/>
+              </a:spcAft>
+            </a:pPr>
+            <a:r>
+              <a:rPr sz="1500">
+                <a:solidFill>
+                  <a:srgbClr val="22282E"/>
+                </a:solidFill>
+              </a:rPr>
+              <a:t>•  Revisa almacenamiento: navega la app y luego inspecciona /data/data/&lt;paquete&gt;/: sharedprefs/.xml, bases databases/.db (ábrelas con sqlite3), y ficheros en claro.</a:t>
+            </a:r>
+          </a:p>
+          <a:p>
+            <a:pPr>
+              <a:spcAft>
+                <a:spcPts val="600"/>
+              </a:spcAft>
+            </a:pPr>
+            <a:r>
+              <a:rPr sz="1500">
+                <a:solidFill>
+                  <a:srgbClr val="22282E"/>
+                </a:solidFill>
+              </a:rPr>
+              <a:t>•  Salta root detection: si la app se cierra al detectar root, usa objection/Frida (android root disable) y documenta el bypass.</a:t>
             </a:r>
           </a:p>
         </p:txBody>
@@ -3347,7 +3381,7 @@
                   <a:srgbClr val="0B3D2E"/>
                 </a:solidFill>
               </a:rPr>
-              <a:t>❓ Preguntas frecuentes</a:t>
+              <a:t>✍️ Ejercicios</a:t>
             </a:r>
           </a:p>
         </p:txBody>
@@ -3385,82 +3419,82 @@
                   <a:srgbClr val="22282E"/>
                 </a:solidFill>
               </a:rPr>
-              <a:t>•  ❓ ¿Por qué Burp no intercepta aunque instalé el certificado?</a:t>
-            </a:r>
-          </a:p>
-          <a:p>
-            <a:pPr>
-              <a:spcAft>
-                <a:spcPts val="600"/>
-              </a:spcAft>
-            </a:pPr>
-            <a:r>
-              <a:rPr sz="1500">
-                <a:solidFill>
-                  <a:srgbClr val="22282E"/>
-                </a:solidFill>
-              </a:rPr>
-              <a:t>•  Desde Android 7, las apps por defecto no confían en CA de usuario. Debes instalarlo como CA de sistema (requiere root) y, si hay pinning, evadirlo con Frida/objection.</a:t>
-            </a:r>
-          </a:p>
-          <a:p>
-            <a:pPr>
-              <a:spcAft>
-                <a:spcPts val="600"/>
-              </a:spcAft>
-            </a:pPr>
-            <a:r>
-              <a:rPr sz="1500">
-                <a:solidFill>
-                  <a:srgbClr val="22282E"/>
-                </a:solidFill>
-              </a:rPr>
-              <a:t>•  ❓ ¿Necesito el código fuente para hacer el pentest?</a:t>
-            </a:r>
-          </a:p>
-          <a:p>
-            <a:pPr>
-              <a:spcAft>
-                <a:spcPts val="600"/>
-              </a:spcAft>
-            </a:pPr>
-            <a:r>
-              <a:rPr sz="1500">
-                <a:solidFill>
-                  <a:srgbClr val="22282E"/>
-                </a:solidFill>
-              </a:rPr>
-              <a:t>•  No. Con el APK basta: se desensambla a smali y se decompila a Java aproximado con jadx; Frida instrumenta el binario en runtime.</a:t>
-            </a:r>
-          </a:p>
-          <a:p>
-            <a:pPr>
-              <a:spcAft>
-                <a:spcPts val="600"/>
-              </a:spcAft>
-            </a:pPr>
-            <a:r>
-              <a:rPr sz="1500">
-                <a:solidFill>
-                  <a:srgbClr val="22282E"/>
-                </a:solidFill>
-              </a:rPr>
-              <a:t>•  ❓ ¿Es suficiente MobSF para un informe profesional?</a:t>
-            </a:r>
-          </a:p>
-          <a:p>
-            <a:pPr>
-              <a:spcAft>
-                <a:spcPts val="600"/>
-              </a:spcAft>
-            </a:pPr>
-            <a:r>
-              <a:rPr sz="1500">
-                <a:solidFill>
-                  <a:srgbClr val="22282E"/>
-                </a:solidFill>
-              </a:rPr>
-              <a:t>•  No. MobSF acelera el triage, pero genera falsos positivos y no valida explotabilidad. El análisis manual y dinámico es indispensable.</a:t>
+              <a:t>•  Extrae y decompila un APK propio y localiza una URL o clave hardcodeada.</a:t>
+            </a:r>
+          </a:p>
+          <a:p>
+            <a:pPr>
+              <a:spcAft>
+                <a:spcPts val="600"/>
+              </a:spcAft>
+            </a:pPr>
+            <a:r>
+              <a:rPr sz="1500">
+                <a:solidFill>
+                  <a:srgbClr val="22282E"/>
+                </a:solidFill>
+              </a:rPr>
+              <a:t>•  Instala el CA de Burp como certificado de sistema y demuestra interceptación de una petición.</a:t>
+            </a:r>
+          </a:p>
+          <a:p>
+            <a:pPr>
+              <a:spcAft>
+                <a:spcPts val="600"/>
+              </a:spcAft>
+            </a:pPr>
+            <a:r>
+              <a:rPr sz="1500">
+                <a:solidFill>
+                  <a:srgbClr val="22282E"/>
+                </a:solidFill>
+              </a:rPr>
+              <a:t>•  Escribe (o adapta) un script Frida que registre los argumentos de una función de login.</a:t>
+            </a:r>
+          </a:p>
+          <a:p>
+            <a:pPr>
+              <a:spcAft>
+                <a:spcPts val="600"/>
+              </a:spcAft>
+            </a:pPr>
+            <a:r>
+              <a:rPr sz="1500">
+                <a:solidFill>
+                  <a:srgbClr val="22282E"/>
+                </a:solidFill>
+              </a:rPr>
+              <a:t>•  Vuelca una base SQLite de la app y extrae datos almacenados sin cifrar.</a:t>
+            </a:r>
+          </a:p>
+          <a:p>
+            <a:pPr>
+              <a:spcAft>
+                <a:spcPts val="600"/>
+              </a:spcAft>
+            </a:pPr>
+            <a:r>
+              <a:rPr sz="1500">
+                <a:solidFill>
+                  <a:srgbClr val="22282E"/>
+                </a:solidFill>
+              </a:rPr>
+              <a:t>•  Compara los hallazgos automáticos de MobSF con los que encontraste manualmente y explica las diferencias.</a:t>
+            </a:r>
+          </a:p>
+          <a:p>
+            <a:pPr>
+              <a:spcAft>
+                <a:spcPts val="600"/>
+              </a:spcAft>
+            </a:pPr>
+            <a:r>
+              <a:rPr sz="1500">
+                <a:solidFill>
+                  <a:srgbClr val="22282E"/>
+                </a:solidFill>
+              </a:rPr>
+              <a:t>•  Mapea cinco hallazgos a los controles MASVS-STORAGE, MASVS-NETWORK y MASVS-RESILIENCE.</a:t>
             </a:r>
           </a:p>
         </p:txBody>
@@ -3511,7 +3545,7 @@
                   <a:srgbClr val="0B3D2E"/>
                 </a:solidFill>
               </a:rPr>
-              <a:t>🔗 Referencias</a:t>
+              <a:t>📝 Reto verificable</a:t>
             </a:r>
           </a:p>
         </p:txBody>
@@ -3549,6 +3583,408 @@
                   <a:srgbClr val="22282E"/>
                 </a:solidFill>
               </a:rPr>
+              <a:t>•  Realiza un pentest completo de una app deliberadamente vulnerable y entrega un mini-informe con al menos tres hallazgos de categorías distintas (almacenamiento, comunicación, resiliencia), cada uno…</a:t>
+            </a:r>
+          </a:p>
+        </p:txBody>
+      </p:sp>
+    </p:spTree>
+  </p:cSld>
+  <p:clrMapOvr>
+    <a:masterClrMapping/>
+  </p:clrMapOvr>
+</p:sld>
+</file>
+
+<file path=ppt/slides/slide13.xml><?xml version="1.0" encoding="utf-8"?>
+<p:sld xmlns:a="http://schemas.openxmlformats.org/drawingml/2006/main" xmlns:p="http://schemas.openxmlformats.org/presentationml/2006/main" xmlns:r="http://schemas.openxmlformats.org/officeDocument/2006/relationships">
+  <p:cSld>
+    <p:spTree>
+      <p:nvGrpSpPr>
+        <p:cNvPr id="1" name=""/>
+        <p:cNvGrpSpPr/>
+        <p:nvPr/>
+      </p:nvGrpSpPr>
+      <p:grpSpPr/>
+      <p:sp>
+        <p:nvSpPr>
+          <p:cNvPr id="2" name="TextBox 1"/>
+          <p:cNvSpPr txBox="1"/>
+          <p:nvPr/>
+        </p:nvSpPr>
+        <p:spPr>
+          <a:xfrm>
+            <a:off x="457200" y="320040"/>
+            <a:ext cx="8229600" cy="822960"/>
+          </a:xfrm>
+          <a:prstGeom prst="rect">
+            <a:avLst/>
+          </a:prstGeom>
+          <a:noFill/>
+        </p:spPr>
+        <p:txBody>
+          <a:bodyPr wrap="square">
+            <a:spAutoFit/>
+          </a:bodyPr>
+          <a:lstStyle/>
+          <a:p>
+            <a:r>
+              <a:rPr sz="2600" b="1">
+                <a:solidFill>
+                  <a:srgbClr val="0B3D2E"/>
+                </a:solidFill>
+              </a:rPr>
+              <a:t>⚠️ Errores comunes</a:t>
+            </a:r>
+          </a:p>
+        </p:txBody>
+      </p:sp>
+      <p:sp>
+        <p:nvSpPr>
+          <p:cNvPr id="3" name="TextBox 2"/>
+          <p:cNvSpPr txBox="1"/>
+          <p:nvPr/>
+        </p:nvSpPr>
+        <p:spPr>
+          <a:xfrm>
+            <a:off x="457200" y="1280160"/>
+            <a:ext cx="8229600" cy="4937760"/>
+          </a:xfrm>
+          <a:prstGeom prst="rect">
+            <a:avLst/>
+          </a:prstGeom>
+          <a:noFill/>
+        </p:spPr>
+        <p:txBody>
+          <a:bodyPr wrap="square">
+            <a:spAutoFit/>
+          </a:bodyPr>
+          <a:lstStyle/>
+          <a:p>
+            <a:pPr>
+              <a:spcAft>
+                <a:spcPts val="600"/>
+              </a:spcAft>
+            </a:pPr>
+            <a:r>
+              <a:rPr sz="1500">
+                <a:solidFill>
+                  <a:srgbClr val="22282E"/>
+                </a:solidFill>
+              </a:rPr>
+              <a:t>•  Burp no ve tráfico HTTPS — El CA no está en el almacén de sistema o hay pinning; instala CA de sistema y evade pinning</a:t>
+            </a:r>
+          </a:p>
+          <a:p>
+            <a:pPr>
+              <a:spcAft>
+                <a:spcPts val="600"/>
+              </a:spcAft>
+            </a:pPr>
+            <a:r>
+              <a:rPr sz="1500">
+                <a:solidFill>
+                  <a:srgbClr val="22282E"/>
+                </a:solidFill>
+              </a:rPr>
+              <a:t>•  Failed to spawn: unable to find process (Frida) — frida-server no corre o versión distinta; empareja versiones cliente/servidor</a:t>
+            </a:r>
+          </a:p>
+          <a:p>
+            <a:pPr>
+              <a:spcAft>
+                <a:spcPts val="600"/>
+              </a:spcAft>
+            </a:pPr>
+            <a:r>
+              <a:rPr sz="1500">
+                <a:solidFill>
+                  <a:srgbClr val="22282E"/>
+                </a:solidFill>
+              </a:rPr>
+              <a:t>•  App se cierra al abrir — Root/emulador/pinning detection; usa objection para desactivarlos</a:t>
+            </a:r>
+          </a:p>
+          <a:p>
+            <a:pPr>
+              <a:spcAft>
+                <a:spcPts val="600"/>
+              </a:spcAft>
+            </a:pPr>
+            <a:r>
+              <a:rPr sz="1500">
+                <a:solidFill>
+                  <a:srgbClr val="22282E"/>
+                </a:solidFill>
+              </a:rPr>
+              <a:t>•  apktool falla al recompilar — Recursos corruptos; usa -r o trabaja con smali sin recompilar</a:t>
+            </a:r>
+          </a:p>
+          <a:p>
+            <a:pPr>
+              <a:spcAft>
+                <a:spcPts val="600"/>
+              </a:spcAft>
+            </a:pPr>
+            <a:r>
+              <a:rPr sz="1500">
+                <a:solidFill>
+                  <a:srgbClr val="22282E"/>
+                </a:solidFill>
+              </a:rPr>
+              <a:t>•  CA instalado como "usuario" ignorado — Desde Android 7 las apps ignoran CA de usuario; instálalo como sistema</a:t>
+            </a:r>
+          </a:p>
+        </p:txBody>
+      </p:sp>
+    </p:spTree>
+  </p:cSld>
+  <p:clrMapOvr>
+    <a:masterClrMapping/>
+  </p:clrMapOvr>
+</p:sld>
+</file>
+
+<file path=ppt/slides/slide14.xml><?xml version="1.0" encoding="utf-8"?>
+<p:sld xmlns:a="http://schemas.openxmlformats.org/drawingml/2006/main" xmlns:p="http://schemas.openxmlformats.org/presentationml/2006/main" xmlns:r="http://schemas.openxmlformats.org/officeDocument/2006/relationships">
+  <p:cSld>
+    <p:spTree>
+      <p:nvGrpSpPr>
+        <p:cNvPr id="1" name=""/>
+        <p:cNvGrpSpPr/>
+        <p:nvPr/>
+      </p:nvGrpSpPr>
+      <p:grpSpPr/>
+      <p:sp>
+        <p:nvSpPr>
+          <p:cNvPr id="2" name="TextBox 1"/>
+          <p:cNvSpPr txBox="1"/>
+          <p:nvPr/>
+        </p:nvSpPr>
+        <p:spPr>
+          <a:xfrm>
+            <a:off x="457200" y="320040"/>
+            <a:ext cx="8229600" cy="822960"/>
+          </a:xfrm>
+          <a:prstGeom prst="rect">
+            <a:avLst/>
+          </a:prstGeom>
+          <a:noFill/>
+        </p:spPr>
+        <p:txBody>
+          <a:bodyPr wrap="square">
+            <a:spAutoFit/>
+          </a:bodyPr>
+          <a:lstStyle/>
+          <a:p>
+            <a:r>
+              <a:rPr sz="2600" b="1">
+                <a:solidFill>
+                  <a:srgbClr val="0B3D2E"/>
+                </a:solidFill>
+              </a:rPr>
+              <a:t>❓ Preguntas frecuentes</a:t>
+            </a:r>
+          </a:p>
+        </p:txBody>
+      </p:sp>
+      <p:sp>
+        <p:nvSpPr>
+          <p:cNvPr id="3" name="TextBox 2"/>
+          <p:cNvSpPr txBox="1"/>
+          <p:nvPr/>
+        </p:nvSpPr>
+        <p:spPr>
+          <a:xfrm>
+            <a:off x="457200" y="1280160"/>
+            <a:ext cx="8229600" cy="4937760"/>
+          </a:xfrm>
+          <a:prstGeom prst="rect">
+            <a:avLst/>
+          </a:prstGeom>
+          <a:noFill/>
+        </p:spPr>
+        <p:txBody>
+          <a:bodyPr wrap="square">
+            <a:spAutoFit/>
+          </a:bodyPr>
+          <a:lstStyle/>
+          <a:p>
+            <a:pPr>
+              <a:spcAft>
+                <a:spcPts val="600"/>
+              </a:spcAft>
+            </a:pPr>
+            <a:r>
+              <a:rPr sz="1500">
+                <a:solidFill>
+                  <a:srgbClr val="22282E"/>
+                </a:solidFill>
+              </a:rPr>
+              <a:t>•  ❓ ¿Por qué Burp no intercepta aunque instalé el certificado?</a:t>
+            </a:r>
+          </a:p>
+          <a:p>
+            <a:pPr>
+              <a:spcAft>
+                <a:spcPts val="600"/>
+              </a:spcAft>
+            </a:pPr>
+            <a:r>
+              <a:rPr sz="1500">
+                <a:solidFill>
+                  <a:srgbClr val="22282E"/>
+                </a:solidFill>
+              </a:rPr>
+              <a:t>•  Desde Android 7, las apps por defecto no confían en CA de usuario. Debes instalarlo como CA de sistema (requiere root) y, si hay pinning, evadirlo con Frida/objection.</a:t>
+            </a:r>
+          </a:p>
+          <a:p>
+            <a:pPr>
+              <a:spcAft>
+                <a:spcPts val="600"/>
+              </a:spcAft>
+            </a:pPr>
+            <a:r>
+              <a:rPr sz="1500">
+                <a:solidFill>
+                  <a:srgbClr val="22282E"/>
+                </a:solidFill>
+              </a:rPr>
+              <a:t>•  ❓ ¿Necesito el código fuente para hacer el pentest?</a:t>
+            </a:r>
+          </a:p>
+          <a:p>
+            <a:pPr>
+              <a:spcAft>
+                <a:spcPts val="600"/>
+              </a:spcAft>
+            </a:pPr>
+            <a:r>
+              <a:rPr sz="1500">
+                <a:solidFill>
+                  <a:srgbClr val="22282E"/>
+                </a:solidFill>
+              </a:rPr>
+              <a:t>•  No. Con el APK basta: se desensambla a smali y se decompila a Java aproximado con jadx; Frida instrumenta el binario en runtime.</a:t>
+            </a:r>
+          </a:p>
+          <a:p>
+            <a:pPr>
+              <a:spcAft>
+                <a:spcPts val="600"/>
+              </a:spcAft>
+            </a:pPr>
+            <a:r>
+              <a:rPr sz="1500">
+                <a:solidFill>
+                  <a:srgbClr val="22282E"/>
+                </a:solidFill>
+              </a:rPr>
+              <a:t>•  ❓ ¿Es suficiente MobSF para un informe profesional?</a:t>
+            </a:r>
+          </a:p>
+          <a:p>
+            <a:pPr>
+              <a:spcAft>
+                <a:spcPts val="600"/>
+              </a:spcAft>
+            </a:pPr>
+            <a:r>
+              <a:rPr sz="1500">
+                <a:solidFill>
+                  <a:srgbClr val="22282E"/>
+                </a:solidFill>
+              </a:rPr>
+              <a:t>•  No. MobSF acelera el triage, pero genera falsos positivos y no valida explotabilidad. El análisis manual y dinámico es indispensable.</a:t>
+            </a:r>
+          </a:p>
+        </p:txBody>
+      </p:sp>
+    </p:spTree>
+  </p:cSld>
+  <p:clrMapOvr>
+    <a:masterClrMapping/>
+  </p:clrMapOvr>
+</p:sld>
+</file>
+
+<file path=ppt/slides/slide15.xml><?xml version="1.0" encoding="utf-8"?>
+<p:sld xmlns:a="http://schemas.openxmlformats.org/drawingml/2006/main" xmlns:p="http://schemas.openxmlformats.org/presentationml/2006/main" xmlns:r="http://schemas.openxmlformats.org/officeDocument/2006/relationships">
+  <p:cSld>
+    <p:spTree>
+      <p:nvGrpSpPr>
+        <p:cNvPr id="1" name=""/>
+        <p:cNvGrpSpPr/>
+        <p:nvPr/>
+      </p:nvGrpSpPr>
+      <p:grpSpPr/>
+      <p:sp>
+        <p:nvSpPr>
+          <p:cNvPr id="2" name="TextBox 1"/>
+          <p:cNvSpPr txBox="1"/>
+          <p:nvPr/>
+        </p:nvSpPr>
+        <p:spPr>
+          <a:xfrm>
+            <a:off x="457200" y="320040"/>
+            <a:ext cx="8229600" cy="822960"/>
+          </a:xfrm>
+          <a:prstGeom prst="rect">
+            <a:avLst/>
+          </a:prstGeom>
+          <a:noFill/>
+        </p:spPr>
+        <p:txBody>
+          <a:bodyPr wrap="square">
+            <a:spAutoFit/>
+          </a:bodyPr>
+          <a:lstStyle/>
+          <a:p>
+            <a:r>
+              <a:rPr sz="2600" b="1">
+                <a:solidFill>
+                  <a:srgbClr val="0B3D2E"/>
+                </a:solidFill>
+              </a:rPr>
+              <a:t>🔗 Referencias</a:t>
+            </a:r>
+          </a:p>
+        </p:txBody>
+      </p:sp>
+      <p:sp>
+        <p:nvSpPr>
+          <p:cNvPr id="3" name="TextBox 2"/>
+          <p:cNvSpPr txBox="1"/>
+          <p:nvPr/>
+        </p:nvSpPr>
+        <p:spPr>
+          <a:xfrm>
+            <a:off x="457200" y="1280160"/>
+            <a:ext cx="8229600" cy="4937760"/>
+          </a:xfrm>
+          <a:prstGeom prst="rect">
+            <a:avLst/>
+          </a:prstGeom>
+          <a:noFill/>
+        </p:spPr>
+        <p:txBody>
+          <a:bodyPr wrap="square">
+            <a:spAutoFit/>
+          </a:bodyPr>
+          <a:lstStyle/>
+          <a:p>
+            <a:pPr>
+              <a:spcAft>
+                <a:spcPts val="600"/>
+              </a:spcAft>
+            </a:pPr>
+            <a:r>
+              <a:rPr sz="1500">
+                <a:solidFill>
+                  <a:srgbClr val="22282E"/>
+                </a:solidFill>
+              </a:rPr>
               <a:t>•  OWASP MASTG — Android testing: &lt;https://mas.owasp.org/MASTG/&gt;</a:t>
             </a:r>
           </a:p>
@@ -3599,6 +4035,81 @@
           </a:p>
         </p:txBody>
       </p:sp>
+    </p:spTree>
+  </p:cSld>
+  <p:clrMapOvr>
+    <a:masterClrMapping/>
+  </p:clrMapOvr>
+</p:sld>
+</file>
+
+<file path=ppt/slides/slide16.xml><?xml version="1.0" encoding="utf-8"?>
+<p:sld xmlns:a="http://schemas.openxmlformats.org/drawingml/2006/main" xmlns:p="http://schemas.openxmlformats.org/presentationml/2006/main" xmlns:r="http://schemas.openxmlformats.org/officeDocument/2006/relationships">
+  <p:cSld>
+    <p:spTree>
+      <p:nvGrpSpPr>
+        <p:cNvPr id="1" name=""/>
+        <p:cNvGrpSpPr/>
+        <p:nvPr/>
+      </p:nvGrpSpPr>
+      <p:grpSpPr/>
+      <p:sp>
+        <p:nvSpPr>
+          <p:cNvPr id="2" name="TextBox 1"/>
+          <p:cNvSpPr txBox="1"/>
+          <p:nvPr/>
+        </p:nvSpPr>
+        <p:spPr>
+          <a:xfrm>
+            <a:off x="457200" y="274320"/>
+            <a:ext cx="8229600" cy="640080"/>
+          </a:xfrm>
+          <a:prstGeom prst="rect">
+            <a:avLst/>
+          </a:prstGeom>
+          <a:noFill/>
+        </p:spPr>
+        <p:txBody>
+          <a:bodyPr wrap="square">
+            <a:spAutoFit/>
+          </a:bodyPr>
+          <a:lstStyle/>
+          <a:p>
+            <a:r>
+              <a:rPr sz="2200" b="1">
+                <a:solidFill>
+                  <a:srgbClr val="0B3D2E"/>
+                </a:solidFill>
+              </a:rPr>
+              <a:t>Diagrama de la clase</a:t>
+            </a:r>
+          </a:p>
+        </p:txBody>
+      </p:sp>
+      <p:pic>
+        <p:nvPicPr>
+          <p:cNvPr id="3" name="Picture 2" descr="81edde1831c9e6cd.png"/>
+          <p:cNvPicPr>
+            <a:picLocks noChangeAspect="1"/>
+          </p:cNvPicPr>
+          <p:nvPr/>
+        </p:nvPicPr>
+        <p:blipFill>
+          <a:blip r:embed="rId2"/>
+          <a:stretch>
+            <a:fillRect/>
+          </a:stretch>
+        </p:blipFill>
+        <p:spPr>
+          <a:xfrm>
+            <a:off x="457200" y="3529584"/>
+            <a:ext cx="8229600" cy="438912"/>
+          </a:xfrm>
+          <a:prstGeom prst="rect">
+            <a:avLst/>
+          </a:prstGeom>
+        </p:spPr>
+      </p:pic>
     </p:spTree>
   </p:cSld>
   <p:clrMapOvr>
@@ -3683,7 +4194,7 @@
                   <a:srgbClr val="22282E"/>
                 </a:solidFill>
               </a:rPr>
-              <a:t>•  Ejecutar una evaluación de seguridad completa de una aplicación Android combinando análisis estático (SAST), dinámico (DAST) e instrumentación en tiempo de ejecución. El alumno montará el entorno, interceptará el tráfico HTTPS de la app, evadirá certificate pinning y detección de root en laboratorio, y buscará las vulnerabilidades del top de OWASP MASVS: almacenamiento inseguro, comunicación débil y lógica del lado del cliente evadible.</a:t>
+              <a:t>•  Ejecutar una evaluación de seguridad completa de una aplicación Android combinando análisis estático (SAST), dinámico (DAST) e instrumentación en tiempo de ejecución. El alumno montará el entorno…</a:t>
             </a:r>
           </a:p>
         </p:txBody>
@@ -4092,7 +4603,7 @@
                   <a:srgbClr val="0B3D2E"/>
                 </a:solidFill>
               </a:rPr>
-              <a:t>📖 Definiciones y características</a:t>
+              <a:t>🧠 Explicación en profundidad</a:t>
             </a:r>
           </a:p>
         </p:txBody>
@@ -4130,82 +4641,52 @@
                   <a:srgbClr val="22282E"/>
                 </a:solidFill>
               </a:rPr>
-              <a:t>•  MobSF (Mobile Security Framework): plataforma de análisis estático y dinámico de APK/IPA. Característica: informe automatizado con hallazgos y evidencias.</a:t>
-            </a:r>
-          </a:p>
-          <a:p>
-            <a:pPr>
-              <a:spcAft>
-                <a:spcPts val="600"/>
-              </a:spcAft>
-            </a:pPr>
-            <a:r>
-              <a:rPr sz="1500">
-                <a:solidFill>
-                  <a:srgbClr val="22282E"/>
-                </a:solidFill>
-              </a:rPr>
-              <a:t>•  Certificate pinning: la app solo confía en un certificado/clave concreto, ignorando el almacén del sistema. Característica: rompe la interceptación con proxy salvo que se evada.</a:t>
-            </a:r>
-          </a:p>
-          <a:p>
-            <a:pPr>
-              <a:spcAft>
-                <a:spcPts val="600"/>
-              </a:spcAft>
-            </a:pPr>
-            <a:r>
-              <a:rPr sz="1500">
-                <a:solidFill>
-                  <a:srgbClr val="22282E"/>
-                </a:solidFill>
-              </a:rPr>
-              <a:t>•  Frida: toolkit de instrumentación dinámica que inyecta JavaScript en el proceso de la app. Característica: modifica métodos en runtime sin recompilar.</a:t>
-            </a:r>
-          </a:p>
-          <a:p>
-            <a:pPr>
-              <a:spcAft>
-                <a:spcPts val="600"/>
-              </a:spcAft>
-            </a:pPr>
-            <a:r>
-              <a:rPr sz="1500">
-                <a:solidFill>
-                  <a:srgbClr val="22282E"/>
-                </a:solidFill>
-              </a:rPr>
-              <a:t>•  objection: framework sobre Frida con comandos listos (bypass pinning, root detection, volcado de Keystore). Característica: acelera tareas comunes.</a:t>
-            </a:r>
-          </a:p>
-          <a:p>
-            <a:pPr>
-              <a:spcAft>
-                <a:spcPts val="600"/>
-              </a:spcAft>
-            </a:pPr>
-            <a:r>
-              <a:rPr sz="1500">
-                <a:solidFill>
-                  <a:srgbClr val="22282E"/>
-                </a:solidFill>
-              </a:rPr>
-              <a:t>•  OWASP MASVS: estándar de requisitos de seguridad para apps móviles. Característica: define niveles L1/L2 y controles verificables.</a:t>
-            </a:r>
-          </a:p>
-          <a:p>
-            <a:pPr>
-              <a:spcAft>
-                <a:spcPts val="600"/>
-              </a:spcAft>
-            </a:pPr>
-            <a:r>
-              <a:rPr sz="1500">
-                <a:solidFill>
-                  <a:srgbClr val="22282E"/>
-                </a:solidFill>
-              </a:rPr>
-              <a:t>•  Smali: representación legible del bytecode Dalvik tras desensamblar con apktool. Característica: permite parchear y recompilar la app.</a:t>
+              <a:t>•  MASVS expresa grupos de requisitos; MASTG aporta técnicas de prueba. El trabajo comienza con alcance, versión, backend, cuentas, datos y propiedades: «un usuario no lee el objeto de otro», «una clave…</a:t>
+            </a:r>
+          </a:p>
+          <a:p>
+            <a:pPr>
+              <a:spcAft>
+                <a:spcPts val="600"/>
+              </a:spcAft>
+            </a:pPr>
+            <a:r>
+              <a:rPr sz="1500">
+                <a:solidFill>
+                  <a:srgbClr val="22282E"/>
+                </a:solidFill>
+              </a:rPr>
+              <a:t>•  El manifiesto revela componentes, permisos, backup, depuración y configuración de red. JADX aproxima Java/Kotlin desde DEX, pero el código reconstruido puede perder nombres o semántica. MobSF…</a:t>
+            </a:r>
+          </a:p>
+          <a:p>
+            <a:pPr>
+              <a:spcAft>
+                <a:spcPts val="600"/>
+              </a:spcAft>
+            </a:pPr>
+            <a:r>
+              <a:rPr sz="1500">
+                <a:solidFill>
+                  <a:srgbClr val="22282E"/>
+                </a:solidFill>
+              </a:rPr>
+              <a:t>•  Frida modifica comportamiento en memoria y sirve para validar hipótesis sobre almacenamiento, criptografía o controles locales. Un control antirroot puede elevar coste, pero no debe proteger una…</a:t>
+            </a:r>
+          </a:p>
+          <a:p>
+            <a:pPr>
+              <a:spcAft>
+                <a:spcPts val="600"/>
+              </a:spcAft>
+            </a:pPr>
+            <a:r>
+              <a:rPr sz="1500">
+                <a:solidFill>
+                  <a:srgbClr val="22282E"/>
+                </a:solidFill>
+              </a:rPr>
+              <a:t>•  JADX muestra isPremium en preferencias y Frida permite cambiarlo. Si el servidor vuelve a autorizar cada operación, el cambio solo altera interfaz; si entrega contenido basándose en el flag enviado…</a:t>
             </a:r>
           </a:p>
         </p:txBody>
@@ -4256,7 +4737,7 @@
                   <a:srgbClr val="0B3D2E"/>
                 </a:solidFill>
               </a:rPr>
-              <a:t>🧰 Herramientas y preparación</a:t>
+              <a:t>📔 Glosario operativo</a:t>
             </a:r>
           </a:p>
         </p:txBody>
@@ -4294,97 +4775,82 @@
                   <a:srgbClr val="22282E"/>
                 </a:solidFill>
               </a:rPr>
-              <a:t>•  adb root</a:t>
-            </a:r>
-          </a:p>
-          <a:p>
-            <a:pPr>
-              <a:spcAft>
-                <a:spcPts val="600"/>
-              </a:spcAft>
-            </a:pPr>
-            <a:r>
-              <a:rPr sz="1500">
-                <a:solidFill>
-                  <a:srgbClr val="22282E"/>
-                </a:solidFill>
-              </a:rPr>
-              <a:t>•  adb push frida-server /data/local/tmp/ &amp;&amp; adb shell "chmod 755 /data/local/tmp/frida-server"</a:t>
-            </a:r>
-          </a:p>
-          <a:p>
-            <a:pPr>
-              <a:spcAft>
-                <a:spcPts val="600"/>
-              </a:spcAft>
-            </a:pPr>
-            <a:r>
-              <a:rPr sz="1500">
-                <a:solidFill>
-                  <a:srgbClr val="22282E"/>
-                </a:solidFill>
-              </a:rPr>
-              <a:t>•  adb shell "/data/local/tmp/frida-server &amp;"</a:t>
-            </a:r>
-          </a:p>
-          <a:p>
-            <a:pPr>
-              <a:spcAft>
-                <a:spcPts val="600"/>
-              </a:spcAft>
-            </a:pPr>
-            <a:r>
-              <a:rPr sz="1500">
-                <a:solidFill>
-                  <a:srgbClr val="22282E"/>
-                </a:solidFill>
-              </a:rPr>
-              <a:t>•  pip install frida-tools objection</a:t>
-            </a:r>
-          </a:p>
-          <a:p>
-            <a:pPr>
-              <a:spcAft>
-                <a:spcPts val="600"/>
-              </a:spcAft>
-            </a:pPr>
-            <a:r>
-              <a:rPr sz="1500">
-                <a:solidFill>
-                  <a:srgbClr val="22282E"/>
-                </a:solidFill>
-              </a:rPr>
-              <a:t>•  docker run -it --rm -p 8000:8000 opensecurity/mobile-security-framework-mobsf:latest</a:t>
-            </a:r>
-          </a:p>
-          <a:p>
-            <a:pPr>
-              <a:spcAft>
-                <a:spcPts val="600"/>
-              </a:spcAft>
-            </a:pPr>
-            <a:r>
-              <a:rPr sz="1500">
-                <a:solidFill>
-                  <a:srgbClr val="22282E"/>
-                </a:solidFill>
-              </a:rPr>
-              <a:t>•  Burp Suite o mitmproxy como proxy; instala su CA en el almacén del sistema del AVD.</a:t>
-            </a:r>
-          </a:p>
-          <a:p>
-            <a:pPr>
-              <a:spcAft>
-                <a:spcPts val="600"/>
-              </a:spcAft>
-            </a:pPr>
-            <a:r>
-              <a:rPr sz="1500">
-                <a:solidFill>
-                  <a:srgbClr val="22282E"/>
-                </a:solidFill>
-              </a:rPr>
-              <a:t>•  apktool, jadx y jd-gui para desensamblar/decompilar.</a:t>
+              <a:t>•  Término — Definición útil</a:t>
+            </a:r>
+          </a:p>
+          <a:p>
+            <a:pPr>
+              <a:spcAft>
+                <a:spcPts val="600"/>
+              </a:spcAft>
+            </a:pPr>
+            <a:r>
+              <a:rPr sz="1500">
+                <a:solidFill>
+                  <a:srgbClr val="22282E"/>
+                </a:solidFill>
+              </a:rPr>
+              <a:t>•  MASVS — Estándar de verificación para controles de aplicaciones móviles.</a:t>
+            </a:r>
+          </a:p>
+          <a:p>
+            <a:pPr>
+              <a:spcAft>
+                <a:spcPts val="600"/>
+              </a:spcAft>
+            </a:pPr>
+            <a:r>
+              <a:rPr sz="1500">
+                <a:solidFill>
+                  <a:srgbClr val="22282E"/>
+                </a:solidFill>
+              </a:rPr>
+              <a:t>•  MASTG — Guía de técnicas y casos de prueba móviles.</a:t>
+            </a:r>
+          </a:p>
+          <a:p>
+            <a:pPr>
+              <a:spcAft>
+                <a:spcPts val="600"/>
+              </a:spcAft>
+            </a:pPr>
+            <a:r>
+              <a:rPr sz="1500">
+                <a:solidFill>
+                  <a:srgbClr val="22282E"/>
+                </a:solidFill>
+              </a:rPr>
+              <a:t>•  Instrumentación dinámica — Observación o modificación controlada del proceso en ejecución.</a:t>
+            </a:r>
+          </a:p>
+          <a:p>
+            <a:pPr>
+              <a:spcAft>
+                <a:spcPts val="600"/>
+              </a:spcAft>
+            </a:pPr>
+            <a:r>
+              <a:rPr sz="1500">
+                <a:solidFill>
+                  <a:srgbClr val="22282E"/>
+                </a:solidFill>
+              </a:rPr>
+              <a:t>•  Certificate pinning — Restricción adicional de confianza TLS; no sustituye autorización.</a:t>
+            </a:r>
+          </a:p>
+          <a:p>
+            <a:pPr>
+              <a:spcAft>
+                <a:spcPts val="600"/>
+              </a:spcAft>
+            </a:pPr>
+            <a:r>
+              <a:rPr sz="1500">
+                <a:solidFill>
+                  <a:srgbClr val="22282E"/>
+                </a:solidFill>
+              </a:rPr>
+              <a:t>•  Deep link — URI que puede activar una ruta o componente de la aplicación.</a:t>
             </a:r>
           </a:p>
         </p:txBody>
@@ -4435,7 +4901,7 @@
                   <a:srgbClr val="0B3D2E"/>
                 </a:solidFill>
               </a:rPr>
-              <a:t>🧪 Laboratorio guiado</a:t>
+              <a:t>✅ Criterio de dominio</a:t>
             </a:r>
           </a:p>
         </p:txBody>
@@ -4473,97 +4939,7 @@
                   <a:srgbClr val="22282E"/>
                 </a:solidFill>
               </a:rPr>
-              <a:t>•  Prepara la app objetivo: instala una app vulnerable propia (p. ej. InsecureBankv2) con adb install app.apk.</a:t>
-            </a:r>
-          </a:p>
-          <a:p>
-            <a:pPr>
-              <a:spcAft>
-                <a:spcPts val="600"/>
-              </a:spcAft>
-            </a:pPr>
-            <a:r>
-              <a:rPr sz="1500">
-                <a:solidFill>
-                  <a:srgbClr val="22282E"/>
-                </a:solidFill>
-              </a:rPr>
-              <a:t>•  Análisis estático: sube el APK a MobSF. Anota secretos hardcodeados, permisos peligrosos y componentes exportados que reporte.</a:t>
-            </a:r>
-          </a:p>
-          <a:p>
-            <a:pPr>
-              <a:spcAft>
-                <a:spcPts val="600"/>
-              </a:spcAft>
-            </a:pPr>
-            <a:r>
-              <a:rPr sz="1500">
-                <a:solidFill>
-                  <a:srgbClr val="22282E"/>
-                </a:solidFill>
-              </a:rPr>
-              <a:t>•  Desensambla: apktool d app.apk -o appsrc y jadx app.apk. Busca cadenas sospechosas: grep -ri "http://\|password\|apikey" appsrc.</a:t>
-            </a:r>
-          </a:p>
-          <a:p>
-            <a:pPr>
-              <a:spcAft>
-                <a:spcPts val="600"/>
-              </a:spcAft>
-            </a:pPr>
-            <a:r>
-              <a:rPr sz="1500">
-                <a:solidFill>
-                  <a:srgbClr val="22282E"/>
-                </a:solidFill>
-              </a:rPr>
-              <a:t>•  Configura el proxy: define el proxy del AVD hacia Burp e instala el CA de Burp como certificado del sistema (con root: remonta /system y copia el .0).</a:t>
-            </a:r>
-          </a:p>
-          <a:p>
-            <a:pPr>
-              <a:spcAft>
-                <a:spcPts val="600"/>
-              </a:spcAft>
-            </a:pPr>
-            <a:r>
-              <a:rPr sz="1500">
-                <a:solidFill>
-                  <a:srgbClr val="22282E"/>
-                </a:solidFill>
-              </a:rPr>
-              <a:t>•  Evade el pinning: lanza objection -g &lt;paquete&gt; explore y ejecuta android sslpinning disable, o usa un script Frida de bypass. Verifica que el tráfico HTTPS aparece en Burp.</a:t>
-            </a:r>
-          </a:p>
-          <a:p>
-            <a:pPr>
-              <a:spcAft>
-                <a:spcPts val="600"/>
-              </a:spcAft>
-            </a:pPr>
-            <a:r>
-              <a:rPr sz="1500">
-                <a:solidFill>
-                  <a:srgbClr val="22282E"/>
-                </a:solidFill>
-              </a:rPr>
-              <a:t>•  Revisa almacenamiento: navega la app y luego inspecciona /data/data/&lt;paquete&gt;/: sharedprefs/.xml, bases databases/.db (ábrelas con sqlite3), y ficheros en claro.</a:t>
-            </a:r>
-          </a:p>
-          <a:p>
-            <a:pPr>
-              <a:spcAft>
-                <a:spcPts val="600"/>
-              </a:spcAft>
-            </a:pPr>
-            <a:r>
-              <a:rPr sz="1500">
-                <a:solidFill>
-                  <a:srgbClr val="22282E"/>
-                </a:solidFill>
-              </a:rPr>
-              <a:t>•  Salta root detection: si la app se cierra al detectar root, usa objection/Frida (android root disable) y documenta el bypass.</a:t>
+              <a:t>•  Hay dominio cuando el alumno vincula una propiedad con evidencia estática y dinámica, distingue señal automatizada de impacto, limita la prueba al laboratorio y entrega corrección más retest…</a:t>
             </a:r>
           </a:p>
         </p:txBody>
@@ -4614,7 +4990,7 @@
                   <a:srgbClr val="0B3D2E"/>
                 </a:solidFill>
               </a:rPr>
-              <a:t>✍️ Ejercicios</a:t>
+              <a:t>📖 Definiciones y características</a:t>
             </a:r>
           </a:p>
         </p:txBody>
@@ -4652,82 +5028,82 @@
                   <a:srgbClr val="22282E"/>
                 </a:solidFill>
               </a:rPr>
-              <a:t>•  Extrae y decompila un APK propio y localiza una URL o clave hardcodeada.</a:t>
-            </a:r>
-          </a:p>
-          <a:p>
-            <a:pPr>
-              <a:spcAft>
-                <a:spcPts val="600"/>
-              </a:spcAft>
-            </a:pPr>
-            <a:r>
-              <a:rPr sz="1500">
-                <a:solidFill>
-                  <a:srgbClr val="22282E"/>
-                </a:solidFill>
-              </a:rPr>
-              <a:t>•  Instala el CA de Burp como certificado de sistema y demuestra interceptación de una petición.</a:t>
-            </a:r>
-          </a:p>
-          <a:p>
-            <a:pPr>
-              <a:spcAft>
-                <a:spcPts val="600"/>
-              </a:spcAft>
-            </a:pPr>
-            <a:r>
-              <a:rPr sz="1500">
-                <a:solidFill>
-                  <a:srgbClr val="22282E"/>
-                </a:solidFill>
-              </a:rPr>
-              <a:t>•  Escribe (o adapta) un script Frida que registre los argumentos de una función de login.</a:t>
-            </a:r>
-          </a:p>
-          <a:p>
-            <a:pPr>
-              <a:spcAft>
-                <a:spcPts val="600"/>
-              </a:spcAft>
-            </a:pPr>
-            <a:r>
-              <a:rPr sz="1500">
-                <a:solidFill>
-                  <a:srgbClr val="22282E"/>
-                </a:solidFill>
-              </a:rPr>
-              <a:t>•  Vuelca una base SQLite de la app y extrae datos almacenados sin cifrar.</a:t>
-            </a:r>
-          </a:p>
-          <a:p>
-            <a:pPr>
-              <a:spcAft>
-                <a:spcPts val="600"/>
-              </a:spcAft>
-            </a:pPr>
-            <a:r>
-              <a:rPr sz="1500">
-                <a:solidFill>
-                  <a:srgbClr val="22282E"/>
-                </a:solidFill>
-              </a:rPr>
-              <a:t>•  Compara los hallazgos automáticos de MobSF con los que encontraste manualmente y explica las diferencias.</a:t>
-            </a:r>
-          </a:p>
-          <a:p>
-            <a:pPr>
-              <a:spcAft>
-                <a:spcPts val="600"/>
-              </a:spcAft>
-            </a:pPr>
-            <a:r>
-              <a:rPr sz="1500">
-                <a:solidFill>
-                  <a:srgbClr val="22282E"/>
-                </a:solidFill>
-              </a:rPr>
-              <a:t>•  Mapea cinco hallazgos a los controles MASVS-STORAGE, MASVS-NETWORK y MASVS-RESILIENCE.</a:t>
+              <a:t>•  MobSF (Mobile Security Framework): plataforma de análisis estático y dinámico de APK/IPA. Característica: informe automatizado con hallazgos y evidencias.</a:t>
+            </a:r>
+          </a:p>
+          <a:p>
+            <a:pPr>
+              <a:spcAft>
+                <a:spcPts val="600"/>
+              </a:spcAft>
+            </a:pPr>
+            <a:r>
+              <a:rPr sz="1500">
+                <a:solidFill>
+                  <a:srgbClr val="22282E"/>
+                </a:solidFill>
+              </a:rPr>
+              <a:t>•  Certificate pinning: la app solo confía en un certificado/clave concreto, ignorando el almacén del sistema. Característica: rompe la interceptación con proxy salvo que se evada.</a:t>
+            </a:r>
+          </a:p>
+          <a:p>
+            <a:pPr>
+              <a:spcAft>
+                <a:spcPts val="600"/>
+              </a:spcAft>
+            </a:pPr>
+            <a:r>
+              <a:rPr sz="1500">
+                <a:solidFill>
+                  <a:srgbClr val="22282E"/>
+                </a:solidFill>
+              </a:rPr>
+              <a:t>•  Frida: toolkit de instrumentación dinámica que inyecta JavaScript en el proceso de la app. Característica: modifica métodos en runtime sin recompilar.</a:t>
+            </a:r>
+          </a:p>
+          <a:p>
+            <a:pPr>
+              <a:spcAft>
+                <a:spcPts val="600"/>
+              </a:spcAft>
+            </a:pPr>
+            <a:r>
+              <a:rPr sz="1500">
+                <a:solidFill>
+                  <a:srgbClr val="22282E"/>
+                </a:solidFill>
+              </a:rPr>
+              <a:t>•  objection: framework sobre Frida con comandos listos (bypass pinning, root detection, volcado de Keystore). Característica: acelera tareas comunes.</a:t>
+            </a:r>
+          </a:p>
+          <a:p>
+            <a:pPr>
+              <a:spcAft>
+                <a:spcPts val="600"/>
+              </a:spcAft>
+            </a:pPr>
+            <a:r>
+              <a:rPr sz="1500">
+                <a:solidFill>
+                  <a:srgbClr val="22282E"/>
+                </a:solidFill>
+              </a:rPr>
+              <a:t>•  OWASP MASVS: estándar de requisitos de seguridad para apps móviles. Característica: define niveles L1/L2 y controles verificables.</a:t>
+            </a:r>
+          </a:p>
+          <a:p>
+            <a:pPr>
+              <a:spcAft>
+                <a:spcPts val="600"/>
+              </a:spcAft>
+            </a:pPr>
+            <a:r>
+              <a:rPr sz="1500">
+                <a:solidFill>
+                  <a:srgbClr val="22282E"/>
+                </a:solidFill>
+              </a:rPr>
+              <a:t>•  Smali: representación legible del bytecode Dalvik tras desensamblar con apktool. Característica: permite parchear y recompilar la app.</a:t>
             </a:r>
           </a:p>
         </p:txBody>
@@ -4778,7 +5154,7 @@
                   <a:srgbClr val="0B3D2E"/>
                 </a:solidFill>
               </a:rPr>
-              <a:t>📝 Reto verificable</a:t>
+              <a:t>🧰 Herramientas y preparación</a:t>
             </a:r>
           </a:p>
         </p:txBody>
@@ -4816,7 +5192,22 @@
                   <a:srgbClr val="22282E"/>
                 </a:solidFill>
               </a:rPr>
-              <a:t>•  Realiza un pentest completo de una app deliberadamente vulnerable y entrega un mini-informe con al menos tres hallazgos de categorías distintas (almacenamiento, comunicación, resiliencia), cada uno con evidencia reproducible. Criterio de aceptación: para el hallazgo de comunicación, incluyes una captura del tráfico HTTPS interceptado tras evadir el pinning, demostrando que el bypass funcionó.</a:t>
+              <a:t>•  Burp Suite o mitmproxy como proxy; instala su CA en el almacén del sistema del AVD.</a:t>
+            </a:r>
+          </a:p>
+          <a:p>
+            <a:pPr>
+              <a:spcAft>
+                <a:spcPts val="600"/>
+              </a:spcAft>
+            </a:pPr>
+            <a:r>
+              <a:rPr sz="1500">
+                <a:solidFill>
+                  <a:srgbClr val="22282E"/>
+                </a:solidFill>
+              </a:rPr>
+              <a:t>•  apktool, jadx y jd-gui para desensamblar/decompilar.</a:t>
             </a:r>
           </a:p>
         </p:txBody>
